--- a/slides/Archive/RRs.pptx
+++ b/slides/Archive/RRs.pptx
@@ -355,7 +355,7 @@
           <a:p>
             <a:fld id="{182334C1-3A6D-6144-AC61-0E7AF7E52456}" type="datetimeFigureOut">
               <a:rPr lang="en-US" smtClean="0"/>
-              <a:t>9/14/19</a:t>
+              <a:t>9/16/19</a:t>
             </a:fld>
             <a:endParaRPr lang="en-US"/>
           </a:p>
@@ -553,7 +553,7 @@
           <a:p>
             <a:fld id="{182334C1-3A6D-6144-AC61-0E7AF7E52456}" type="datetimeFigureOut">
               <a:rPr lang="en-US" smtClean="0"/>
-              <a:t>9/14/19</a:t>
+              <a:t>9/16/19</a:t>
             </a:fld>
             <a:endParaRPr lang="en-US"/>
           </a:p>
@@ -761,7 +761,7 @@
           <a:p>
             <a:fld id="{182334C1-3A6D-6144-AC61-0E7AF7E52456}" type="datetimeFigureOut">
               <a:rPr lang="en-US" smtClean="0"/>
-              <a:t>9/14/19</a:t>
+              <a:t>9/16/19</a:t>
             </a:fld>
             <a:endParaRPr lang="en-US"/>
           </a:p>
@@ -959,7 +959,7 @@
           <a:p>
             <a:fld id="{182334C1-3A6D-6144-AC61-0E7AF7E52456}" type="datetimeFigureOut">
               <a:rPr lang="en-US" smtClean="0"/>
-              <a:t>9/14/19</a:t>
+              <a:t>9/16/19</a:t>
             </a:fld>
             <a:endParaRPr lang="en-US"/>
           </a:p>
@@ -1234,7 +1234,7 @@
           <a:p>
             <a:fld id="{182334C1-3A6D-6144-AC61-0E7AF7E52456}" type="datetimeFigureOut">
               <a:rPr lang="en-US" smtClean="0"/>
-              <a:t>9/14/19</a:t>
+              <a:t>9/16/19</a:t>
             </a:fld>
             <a:endParaRPr lang="en-US"/>
           </a:p>
@@ -1499,7 +1499,7 @@
           <a:p>
             <a:fld id="{182334C1-3A6D-6144-AC61-0E7AF7E52456}" type="datetimeFigureOut">
               <a:rPr lang="en-US" smtClean="0"/>
-              <a:t>9/14/19</a:t>
+              <a:t>9/16/19</a:t>
             </a:fld>
             <a:endParaRPr lang="en-US"/>
           </a:p>
@@ -1911,7 +1911,7 @@
           <a:p>
             <a:fld id="{182334C1-3A6D-6144-AC61-0E7AF7E52456}" type="datetimeFigureOut">
               <a:rPr lang="en-US" smtClean="0"/>
-              <a:t>9/14/19</a:t>
+              <a:t>9/16/19</a:t>
             </a:fld>
             <a:endParaRPr lang="en-US"/>
           </a:p>
@@ -2052,7 +2052,7 @@
           <a:p>
             <a:fld id="{182334C1-3A6D-6144-AC61-0E7AF7E52456}" type="datetimeFigureOut">
               <a:rPr lang="en-US" smtClean="0"/>
-              <a:t>9/14/19</a:t>
+              <a:t>9/16/19</a:t>
             </a:fld>
             <a:endParaRPr lang="en-US"/>
           </a:p>
@@ -2165,7 +2165,7 @@
           <a:p>
             <a:fld id="{182334C1-3A6D-6144-AC61-0E7AF7E52456}" type="datetimeFigureOut">
               <a:rPr lang="en-US" smtClean="0"/>
-              <a:t>9/14/19</a:t>
+              <a:t>9/16/19</a:t>
             </a:fld>
             <a:endParaRPr lang="en-US"/>
           </a:p>
@@ -2476,7 +2476,7 @@
           <a:p>
             <a:fld id="{182334C1-3A6D-6144-AC61-0E7AF7E52456}" type="datetimeFigureOut">
               <a:rPr lang="en-US" smtClean="0"/>
-              <a:t>9/14/19</a:t>
+              <a:t>9/16/19</a:t>
             </a:fld>
             <a:endParaRPr lang="en-US"/>
           </a:p>
@@ -2764,7 +2764,7 @@
           <a:p>
             <a:fld id="{182334C1-3A6D-6144-AC61-0E7AF7E52456}" type="datetimeFigureOut">
               <a:rPr lang="en-US" smtClean="0"/>
-              <a:t>9/14/19</a:t>
+              <a:t>9/16/19</a:t>
             </a:fld>
             <a:endParaRPr lang="en-US"/>
           </a:p>
@@ -3005,7 +3005,7 @@
           <a:p>
             <a:fld id="{182334C1-3A6D-6144-AC61-0E7AF7E52456}" type="datetimeFigureOut">
               <a:rPr lang="en-US" smtClean="0"/>
-              <a:t>9/14/19</a:t>
+              <a:t>9/16/19</a:t>
             </a:fld>
             <a:endParaRPr lang="en-US"/>
           </a:p>
@@ -3424,10 +3424,10 @@
       </p:grpSpPr>
       <p:pic>
         <p:nvPicPr>
-          <p:cNvPr id="7" name="Picture 6">
-            <a:extLst>
-              <a:ext uri="{FF2B5EF4-FFF2-40B4-BE49-F238E27FC236}">
-                <a16:creationId xmlns:a16="http://schemas.microsoft.com/office/drawing/2014/main" id="{EE453948-8F98-184F-8E6B-57C12627E6AA}"/>
+          <p:cNvPr id="24" name="Picture 23">
+            <a:extLst>
+              <a:ext uri="{FF2B5EF4-FFF2-40B4-BE49-F238E27FC236}">
+                <a16:creationId xmlns:a16="http://schemas.microsoft.com/office/drawing/2014/main" id="{A5CCA20A-AFDA-7140-BEC0-81814A6DBB37}"/>
               </a:ext>
             </a:extLst>
           </p:cNvPr>
@@ -3444,8 +3444,8 @@
         </p:blipFill>
         <p:spPr>
           <a:xfrm>
-            <a:off x="2311875" y="1751500"/>
-            <a:ext cx="6122238" cy="3708564"/>
+            <a:off x="2400559" y="1838240"/>
+            <a:ext cx="5638800" cy="3543300"/>
           </a:xfrm>
           <a:prstGeom prst="rect">
             <a:avLst/>
@@ -3466,8 +3466,8 @@
         </p:nvSpPr>
         <p:spPr>
           <a:xfrm>
-            <a:off x="7333351" y="1243557"/>
-            <a:ext cx="1842867" cy="251818"/>
+            <a:off x="6893056" y="1567899"/>
+            <a:ext cx="1842867" cy="276999"/>
           </a:xfrm>
           <a:prstGeom prst="rect">
             <a:avLst/>
@@ -3481,14 +3481,14 @@
           <a:lstStyle/>
           <a:p>
             <a:r>
-              <a:rPr lang="en-US" sz="1200" b="1" dirty="0">
+              <a:rPr lang="en-US" sz="1200" dirty="0">
                 <a:solidFill>
                   <a:srgbClr val="6A6A6A"/>
                 </a:solidFill>
                 <a:latin typeface="Arial" panose="020B0604020202020204" pitchFamily="34" charset="0"/>
                 <a:cs typeface="Arial" panose="020B0604020202020204" pitchFamily="34" charset="0"/>
               </a:rPr>
-              <a:t>Less likely</a:t>
+              <a:t>less likely</a:t>
             </a:r>
           </a:p>
         </p:txBody>
@@ -3507,7 +3507,7 @@
         </p:nvCxnSpPr>
         <p:spPr>
           <a:xfrm flipH="1">
-            <a:off x="6764958" y="1386719"/>
+            <a:off x="6285147" y="1711061"/>
             <a:ext cx="568393" cy="0"/>
           </a:xfrm>
           <a:prstGeom prst="straightConnector1">
@@ -3550,8 +3550,8 @@
         </p:nvSpPr>
         <p:spPr>
           <a:xfrm>
-            <a:off x="8207261" y="2574554"/>
-            <a:ext cx="1910081" cy="430887"/>
+            <a:off x="7843369" y="2574554"/>
+            <a:ext cx="1673162" cy="430887"/>
           </a:xfrm>
           <a:prstGeom prst="rect">
             <a:avLst/>
@@ -3629,8 +3629,8 @@
         </p:nvSpPr>
         <p:spPr>
           <a:xfrm>
-            <a:off x="7095630" y="2466462"/>
-            <a:ext cx="1006440" cy="499989"/>
+            <a:off x="6869761" y="2466462"/>
+            <a:ext cx="911190" cy="499999"/>
           </a:xfrm>
           <a:custGeom>
             <a:avLst/>
@@ -4253,6 +4253,12 @@
               <a:gd name="connsiteY1" fmla="*/ 499534 h 499989"/>
               <a:gd name="connsiteX2" fmla="*/ 0 w 1017080"/>
               <a:gd name="connsiteY2" fmla="*/ 0 h 499989"/>
+              <a:gd name="connsiteX0" fmla="*/ 920823 w 920823"/>
+              <a:gd name="connsiteY0" fmla="*/ 234202 h 499999"/>
+              <a:gd name="connsiteX1" fmla="*/ 343584 w 920823"/>
+              <a:gd name="connsiteY1" fmla="*/ 499534 h 499999"/>
+              <a:gd name="connsiteX2" fmla="*/ 0 w 920823"/>
+              <a:gd name="connsiteY2" fmla="*/ 0 h 499999"/>
             </a:gdLst>
             <a:ahLst/>
             <a:cxnLst>
@@ -4268,12 +4274,12 @@
             </a:cxnLst>
             <a:rect l="l" t="t" r="r" b="b"/>
             <a:pathLst>
-              <a:path w="1017080" h="499989">
+              <a:path w="920823" h="499999">
                 <a:moveTo>
-                  <a:pt x="1017080" y="227852"/>
+                  <a:pt x="920823" y="234202"/>
                 </a:moveTo>
                 <a:cubicBezTo>
-                  <a:pt x="735804" y="225735"/>
+                  <a:pt x="639547" y="232085"/>
                   <a:pt x="762127" y="512940"/>
                   <a:pt x="343584" y="499534"/>
                 </a:cubicBezTo>
@@ -4352,6 +4358,92 @@
           </a:p>
         </p:txBody>
       </p:sp>
+      <p:sp>
+        <p:nvSpPr>
+          <p:cNvPr id="9" name="TextBox 8">
+            <a:extLst>
+              <a:ext uri="{FF2B5EF4-FFF2-40B4-BE49-F238E27FC236}">
+                <a16:creationId xmlns:a16="http://schemas.microsoft.com/office/drawing/2014/main" id="{E1AA5C3A-68F4-CB49-8F44-90D65C9043B5}"/>
+              </a:ext>
+            </a:extLst>
+          </p:cNvPr>
+          <p:cNvSpPr txBox="1"/>
+          <p:nvPr/>
+        </p:nvSpPr>
+        <p:spPr>
+          <a:xfrm>
+            <a:off x="7929345" y="1565017"/>
+            <a:ext cx="1842867" cy="276999"/>
+          </a:xfrm>
+          <a:prstGeom prst="rect">
+            <a:avLst/>
+          </a:prstGeom>
+          <a:noFill/>
+        </p:spPr>
+        <p:txBody>
+          <a:bodyPr wrap="square" rtlCol="0">
+            <a:spAutoFit/>
+          </a:bodyPr>
+          <a:lstStyle/>
+          <a:p>
+            <a:r>
+              <a:rPr lang="en-US" sz="1200" dirty="0">
+                <a:solidFill>
+                  <a:srgbClr val="6A6A6A"/>
+                </a:solidFill>
+                <a:latin typeface="Arial" panose="020B0604020202020204" pitchFamily="34" charset="0"/>
+                <a:cs typeface="Arial" panose="020B0604020202020204" pitchFamily="34" charset="0"/>
+              </a:rPr>
+              <a:t>more likely</a:t>
+            </a:r>
+          </a:p>
+        </p:txBody>
+      </p:sp>
+      <p:cxnSp>
+        <p:nvCxnSpPr>
+          <p:cNvPr id="15" name="Straight Arrow Connector 14">
+            <a:extLst>
+              <a:ext uri="{FF2B5EF4-FFF2-40B4-BE49-F238E27FC236}">
+                <a16:creationId xmlns:a16="http://schemas.microsoft.com/office/drawing/2014/main" id="{EDA24102-B0F0-D14E-B49A-1A5C7556BC61}"/>
+              </a:ext>
+            </a:extLst>
+          </p:cNvPr>
+          <p:cNvCxnSpPr>
+            <a:cxnSpLocks/>
+          </p:cNvCxnSpPr>
+          <p:nvPr/>
+        </p:nvCxnSpPr>
+        <p:spPr>
+          <a:xfrm>
+            <a:off x="8848555" y="1721272"/>
+            <a:ext cx="530992" cy="0"/>
+          </a:xfrm>
+          <a:prstGeom prst="straightConnector1">
+            <a:avLst/>
+          </a:prstGeom>
+          <a:ln w="19050">
+            <a:solidFill>
+              <a:srgbClr val="6A6A6A"/>
+            </a:solidFill>
+            <a:headEnd type="none" w="sm" len="sm"/>
+            <a:tailEnd type="triangle" w="med" len="med"/>
+          </a:ln>
+        </p:spPr>
+        <p:style>
+          <a:lnRef idx="1">
+            <a:schemeClr val="accent1"/>
+          </a:lnRef>
+          <a:fillRef idx="0">
+            <a:schemeClr val="accent1"/>
+          </a:fillRef>
+          <a:effectRef idx="0">
+            <a:schemeClr val="accent1"/>
+          </a:effectRef>
+          <a:fontRef idx="minor">
+            <a:schemeClr val="tx1"/>
+          </a:fontRef>
+        </p:style>
+      </p:cxnSp>
     </p:spTree>
     <p:extLst>
       <p:ext uri="{BB962C8B-B14F-4D97-AF65-F5344CB8AC3E}">
